--- a/dist/초5/과학/용액과분리/초5_과학_용액과분리_02_혼합물의분리_학생용.pptx
+++ b/dist/초5/과학/용액과분리/초5_과학_용액과분리_02_혼합물의분리_학생용.pptx
@@ -124,20 +124,20 @@
   <p:extLst>
     <p:ext uri="{521415D9-36F7-43E2-AB2F-B90AF26B5E84}">
       <p14:sectionLst xmlns:p14="http://schemas.microsoft.com/office/powerpoint/2010/main">
-        <p14:section name="도입" id="{3c70f433-fb36-5a51-60cd-4e75ef16b41f}">
+        <p14:section name="도입" id="{d84fb70a-3cd8-5182-01e4-1d1a17476a7d}">
           <p14:sldIdLst>
             <p14:sldId id="256"/>
             <p14:sldId id="257"/>
           </p14:sldIdLst>
         </p14:section>
-        <p14:section name="개념" id="{31cdf8ad-99ba-2c24-618f-95c7b66f228d}">
+        <p14:section name="개념" id="{95dd7a32-13ee-4da9-f4a3-3e9fa4188f76}">
           <p14:sldIdLst>
             <p14:sldId id="258"/>
             <p14:sldId id="262"/>
             <p14:sldId id="267"/>
           </p14:sldIdLst>
         </p14:section>
-        <p14:section name="연습" id="{1ffa0a4b-fffa-07e9-8bdc-3efb56dc9506}">
+        <p14:section name="연습" id="{8d6716c1-c61a-9f59-bf1b-9a671d2bb820}">
           <p14:sldIdLst>
             <p14:sldId id="259"/>
             <p14:sldId id="260"/>
@@ -150,30 +150,30 @@
             <p14:sldId id="269"/>
           </p14:sldIdLst>
         </p14:section>
-        <p14:section name="개념" id="{eea292c1-97dd-08d5-9f07-087f567951d5}">
+        <p14:section name="개념" id="{b1430221-fb8c-71f7-8646-579fc4e2c8bb}">
           <p14:sldIdLst/>
         </p14:section>
-        <p14:section name="연습" id="{049f11c5-570b-c04d-a4cc-297687a2e03b}">
+        <p14:section name="연습" id="{2cdc6558-259a-5965-122a-b1bee289d05b}">
           <p14:sldIdLst/>
         </p14:section>
-        <p14:section name="개념" id="{58a8a4cb-92d1-f59d-9e82-267258318b3f}">
+        <p14:section name="개념" id="{381a526b-199c-3f6d-7978-621db6ec9f79}">
           <p14:sldIdLst/>
         </p14:section>
-        <p14:section name="연습" id="{9e2c7ed8-42ea-35a3-03dc-8d325e5f2376}">
+        <p14:section name="연습" id="{3cc9f2f4-cc37-903b-abc4-ae31fe69eca0}">
           <p14:sldIdLst/>
         </p14:section>
-        <p14:section name="확인" id="{e0a70df7-bbb6-9efc-5c3a-658b570778da}">
+        <p14:section name="확인" id="{fe5721d1-c5b3-2c7a-d99a-e334678e108a}">
           <p14:sldIdLst>
             <p14:sldId id="270"/>
             <p14:sldId id="271"/>
           </p14:sldIdLst>
         </p14:section>
-        <p14:section name="정리" id="{927b06ca-a56f-e08c-227c-12f7c614dd2e}">
+        <p14:section name="정리" id="{830071cc-0e43-e47b-e182-6996ac2cba29}">
           <p14:sldIdLst>
             <p14:sldId id="272"/>
           </p14:sldIdLst>
         </p14:section>
-        <p14:section name="보충" id="{073e46bc-a862-e5b1-fcbd-30ffc192fba7}">
+        <p14:section name="보충" id="{e62a85dc-eb75-58a6-b57a-72d1f51eef91}">
           <p14:sldIdLst>
             <p14:sldId id="273"/>
           </p14:sldIdLst>
@@ -3917,7 +3917,7 @@
       </p:sp>
       <p:sp>
         <p:nvSpPr>
-          <p:cNvPr id="3" name="S10-card92"/>
+          <p:cNvPr id="3" name="S10-card86"/>
           <p:cNvSpPr/>
           <p:nvPr/>
         </p:nvSpPr>
@@ -3944,7 +3944,7 @@
       </p:sp>
       <p:sp>
         <p:nvSpPr>
-          <p:cNvPr id="4" name="S10-cardtext93"/>
+          <p:cNvPr id="4" name="S10-cardtext87"/>
           <p:cNvSpPr txBox="1"/>
           <p:nvPr/>
         </p:nvSpPr>
@@ -3986,14 +3986,14 @@
       </p:sp>
       <p:sp>
         <p:nvSpPr>
-          <p:cNvPr id="5" name="S10-figure94" descr="빈 컵 위에 원뿔 모양으로 편 커피 필터를 얹고, 섞은 물을 위에서 붓는 그림"/>
+          <p:cNvPr id="5" name="S10-figure88" descr="빈 컵 위에 원뿔 모양으로 편 커피 필터를 얹은 거름 장치"/>
           <p:cNvSpPr/>
           <p:nvPr/>
         </p:nvSpPr>
         <p:spPr>
           <a:xfrm>
-            <a:off x="9063332" y="2264587"/>
-            <a:ext cx="937933" cy="854887"/>
+            <a:off x="7591340" y="2090217"/>
+            <a:ext cx="1229734" cy="1120851"/>
           </a:xfrm>
           <a:custGeom>
             <a:avLst/>
@@ -4002,18 +4002,18 @@
             <a:cxnLst/>
             <a:rect l="l" t="t" r="r" b="b"/>
             <a:pathLst>
-              <a:path w="937933" h="854887">
+              <a:path w="1229734" h="1120851">
                 <a:moveTo>
                   <a:pt x="0" y="0"/>
                 </a:moveTo>
                 <a:lnTo>
-                  <a:pt x="102586" y="854887"/>
+                  <a:pt x="134502" y="1120851"/>
                 </a:lnTo>
                 <a:lnTo>
-                  <a:pt x="835346" y="854887"/>
+                  <a:pt x="1095232" y="1120851"/>
                 </a:lnTo>
                 <a:lnTo>
-                  <a:pt x="937933" y="0"/>
+                  <a:pt x="1229734" y="0"/>
                 </a:lnTo>
               </a:path>
             </a:pathLst>
@@ -4029,14 +4029,14 @@
       </p:sp>
       <p:sp>
         <p:nvSpPr>
-          <p:cNvPr id="6" name="S10-mark95"/>
+          <p:cNvPr id="6" name="S10-mark89"/>
           <p:cNvSpPr/>
           <p:nvPr/>
         </p:nvSpPr>
         <p:spPr>
           <a:xfrm>
-            <a:off x="8982729" y="1715017"/>
-            <a:ext cx="1099140" cy="793823"/>
+            <a:off x="7525690" y="1449730"/>
+            <a:ext cx="1361034" cy="880669"/>
           </a:xfrm>
           <a:custGeom>
             <a:avLst/>
@@ -4045,18 +4045,18 @@
             <a:cxnLst/>
             <a:rect l="l" t="t" r="r" b="b"/>
             <a:pathLst>
-              <a:path w="1099140" h="793823">
+              <a:path w="1361034" h="880669">
                 <a:moveTo>
                   <a:pt x="0" y="0"/>
                 </a:moveTo>
                 <a:lnTo>
-                  <a:pt x="1099140" y="0"/>
+                  <a:pt x="1361034" y="0"/>
                 </a:lnTo>
                 <a:lnTo>
-                  <a:pt x="671697" y="793823"/>
+                  <a:pt x="840638" y="880669"/>
                 </a:lnTo>
                 <a:lnTo>
-                  <a:pt x="427443" y="793823"/>
+                  <a:pt x="520395" y="880669"/>
                 </a:lnTo>
                 <a:close/>
               </a:path>
@@ -4075,38 +4075,60 @@
       </p:sp>
       <p:sp>
         <p:nvSpPr>
-          <p:cNvPr id="7" name="S10-mark96"/>
+          <p:cNvPr id="7" name="S10-mark90"/>
           <p:cNvSpPr/>
           <p:nvPr/>
         </p:nvSpPr>
         <p:spPr>
-          <a:xfrm>
-            <a:off x="8494222" y="1470763"/>
-            <a:ext cx="549570" cy="366380"/>
+          <a:xfrm flipH="1">
+            <a:off x="8646541" y="1769974"/>
+            <a:ext cx="360274" cy="0"/>
           </a:xfrm>
           <a:prstGeom prst="line">
             <a:avLst/>
           </a:prstGeom>
           <a:noFill/>
-          <a:ln w="31750">
+          <a:ln w="19050">
             <a:solidFill>
-              <a:srgbClr val="3D5A80"/>
+              <a:srgbClr val="6B7280"/>
             </a:solidFill>
             <a:prstDash val="solid"/>
-            <a:tailEnd type="triangle"/>
           </a:ln>
         </p:spPr>
       </p:sp>
       <p:sp>
         <p:nvSpPr>
-          <p:cNvPr id="8" name="S10-label98"/>
+          <p:cNvPr id="8" name="S10-mark91"/>
+          <p:cNvSpPr/>
+          <p:nvPr/>
+        </p:nvSpPr>
+        <p:spPr>
+          <a:xfrm flipH="1">
+            <a:off x="8766632" y="2730703"/>
+            <a:ext cx="240182" cy="0"/>
+          </a:xfrm>
+          <a:prstGeom prst="line">
+            <a:avLst/>
+          </a:prstGeom>
+          <a:noFill/>
+          <a:ln w="19050">
+            <a:solidFill>
+              <a:srgbClr val="6B7280"/>
+            </a:solidFill>
+            <a:prstDash val="solid"/>
+          </a:ln>
+        </p:spPr>
+      </p:sp>
+      <p:sp>
+        <p:nvSpPr>
+          <p:cNvPr id="9" name="S10-label93"/>
           <p:cNvSpPr txBox="1"/>
           <p:nvPr/>
         </p:nvSpPr>
         <p:spPr>
           <a:xfrm>
-            <a:off x="9203622" y="1671083"/>
-            <a:ext cx="657352" cy="698500"/>
+            <a:off x="9086875" y="1595349"/>
+            <a:ext cx="1288796" cy="349250"/>
           </a:xfrm>
           <a:prstGeom prst="rect">
             <a:avLst/>
@@ -4118,7 +4140,7 @@
           <a:bodyPr wrap="square" lIns="0" tIns="0" rIns="0" bIns="0" rtlCol="0" anchor="ctr"/>
           <a:lstStyle/>
           <a:p>
-            <a:pPr eaLnBrk="0" algn="ctr" indent="0" marL="0">
+            <a:pPr eaLnBrk="0" algn="l" indent="0" marL="0">
               <a:buNone/>
             </a:pPr>
             <a:r>
@@ -4130,39 +4152,22 @@
                 <a:ea typeface="맑은 고딕" pitchFamily="34" charset="-122"/>
                 <a:cs typeface="맑은 고딕" pitchFamily="34" charset="-120"/>
               </a:rPr>
-              <a:t>커피</a:t>
+              <a:t>커피 필터</a:t>
             </a:r>
             <a:endParaRPr lang="ko-KR" sz="2200" dirty="0"/>
           </a:p>
-          <a:p>
-            <a:pPr eaLnBrk="0" algn="ctr" indent="0" marL="0">
-              <a:buNone/>
-            </a:pPr>
-            <a:r>
-              <a:rPr lang="ko-KR" altLang="en-US" sz="2200" b="1" dirty="0">
-                <a:solidFill>
-                  <a:srgbClr val="1F2937"/>
-                </a:solidFill>
-                <a:latin typeface="맑은 고딕" pitchFamily="34" charset="0"/>
-                <a:ea typeface="맑은 고딕" pitchFamily="34" charset="-122"/>
-                <a:cs typeface="맑은 고딕" pitchFamily="34" charset="-120"/>
-              </a:rPr>
-              <a:t>필터</a:t>
-            </a:r>
-            <a:endParaRPr lang="ko-KR" sz="2200" dirty="0"/>
-          </a:p>
-        </p:txBody>
-      </p:sp>
-      <p:sp>
-        <p:nvSpPr>
-          <p:cNvPr id="9" name="S10-label100"/>
+        </p:txBody>
+      </p:sp>
+      <p:sp>
+        <p:nvSpPr>
+          <p:cNvPr id="10" name="S10-label95"/>
           <p:cNvSpPr txBox="1"/>
           <p:nvPr/>
         </p:nvSpPr>
         <p:spPr>
           <a:xfrm>
-            <a:off x="9340528" y="2639531"/>
-            <a:ext cx="383540" cy="349250"/>
+            <a:off x="9086875" y="2556078"/>
+            <a:ext cx="741172" cy="349250"/>
           </a:xfrm>
           <a:prstGeom prst="rect">
             <a:avLst/>
@@ -4174,7 +4179,7 @@
           <a:bodyPr wrap="square" lIns="0" tIns="0" rIns="0" bIns="0" rtlCol="0" anchor="ctr"/>
           <a:lstStyle/>
           <a:p>
-            <a:pPr eaLnBrk="0" algn="ctr" indent="0" marL="0">
+            <a:pPr eaLnBrk="0" algn="l" indent="0" marL="0">
               <a:buNone/>
             </a:pPr>
             <a:r>
@@ -4186,7 +4191,7 @@
                 <a:ea typeface="맑은 고딕" pitchFamily="34" charset="-122"/>
                 <a:cs typeface="맑은 고딕" pitchFamily="34" charset="-120"/>
               </a:rPr>
-              <a:t>컵</a:t>
+              <a:t>빈 컵</a:t>
             </a:r>
             <a:endParaRPr lang="ko-KR" sz="2200" dirty="0"/>
           </a:p>
@@ -4194,46 +4199,7 @@
       </p:sp>
       <p:sp>
         <p:nvSpPr>
-          <p:cNvPr id="10" name="S10-label102"/>
-          <p:cNvSpPr txBox="1"/>
-          <p:nvPr/>
-        </p:nvSpPr>
-        <p:spPr>
-          <a:xfrm>
-            <a:off x="8306925" y="1602673"/>
-            <a:ext cx="557784" cy="285750"/>
-          </a:xfrm>
-          <a:prstGeom prst="rect">
-            <a:avLst/>
-          </a:prstGeom>
-          <a:noFill/>
-          <a:ln/>
-        </p:spPr>
-        <p:txBody>
-          <a:bodyPr wrap="square" lIns="0" tIns="0" rIns="0" bIns="0" rtlCol="0" anchor="ctr"/>
-          <a:lstStyle/>
-          <a:p>
-            <a:pPr eaLnBrk="0" algn="ctr" indent="0" marL="0">
-              <a:buNone/>
-            </a:pPr>
-            <a:r>
-              <a:rPr lang="ko-KR" altLang="en-US" sz="1800" b="1" dirty="0">
-                <a:solidFill>
-                  <a:srgbClr val="1F2937"/>
-                </a:solidFill>
-                <a:latin typeface="맑은 고딕" pitchFamily="34" charset="0"/>
-                <a:ea typeface="맑은 고딕" pitchFamily="34" charset="-122"/>
-                <a:cs typeface="맑은 고딕" pitchFamily="34" charset="-120"/>
-              </a:rPr>
-              <a:t>붓기</a:t>
-            </a:r>
-            <a:endParaRPr lang="ko-KR" sz="1800" dirty="0"/>
-          </a:p>
-        </p:txBody>
-      </p:sp>
-      <p:sp>
-        <p:nvSpPr>
-          <p:cNvPr id="11" name="S10-card103"/>
+          <p:cNvPr id="11" name="S10-card96"/>
           <p:cNvSpPr/>
           <p:nvPr/>
         </p:nvSpPr>
@@ -4260,7 +4226,7 @@
       </p:sp>
       <p:sp>
         <p:nvSpPr>
-          <p:cNvPr id="12" name="S10-cardtext104"/>
+          <p:cNvPr id="12" name="S10-cardtext97"/>
           <p:cNvSpPr txBox="1"/>
           <p:nvPr/>
         </p:nvSpPr>
@@ -4342,7 +4308,7 @@
       </p:sp>
       <p:sp>
         <p:nvSpPr>
-          <p:cNvPr id="13" name="S10-stepno105"/>
+          <p:cNvPr id="13" name="S10-stepno98"/>
           <p:cNvSpPr txBox="1"/>
           <p:nvPr/>
         </p:nvSpPr>
@@ -4387,7 +4353,7 @@
       </p:sp>
       <p:sp>
         <p:nvSpPr>
-          <p:cNvPr id="14" name="S10-text106"/>
+          <p:cNvPr id="14" name="S10-text99"/>
           <p:cNvSpPr txBox="1"/>
           <p:nvPr/>
         </p:nvSpPr>
@@ -4443,7 +4409,7 @@
       </p:sp>
       <p:sp>
         <p:nvSpPr>
-          <p:cNvPr id="15" name="S10-stepno107"/>
+          <p:cNvPr id="15" name="S10-stepno100"/>
           <p:cNvSpPr txBox="1"/>
           <p:nvPr/>
         </p:nvSpPr>
@@ -4488,7 +4454,7 @@
       </p:sp>
       <p:sp>
         <p:nvSpPr>
-          <p:cNvPr id="16" name="S10-text108"/>
+          <p:cNvPr id="16" name="S10-text101"/>
           <p:cNvSpPr txBox="1"/>
           <p:nvPr/>
         </p:nvSpPr>
@@ -4544,7 +4510,7 @@
       </p:sp>
       <p:sp>
         <p:nvSpPr>
-          <p:cNvPr id="17" name="S10-stepno109"/>
+          <p:cNvPr id="17" name="S10-stepno102"/>
           <p:cNvSpPr txBox="1"/>
           <p:nvPr/>
         </p:nvSpPr>
@@ -4589,7 +4555,7 @@
       </p:sp>
       <p:sp>
         <p:nvSpPr>
-          <p:cNvPr id="18" name="S10-text110"/>
+          <p:cNvPr id="18" name="S10-text103"/>
           <p:cNvSpPr txBox="1"/>
           <p:nvPr/>
         </p:nvSpPr>
@@ -4645,7 +4611,7 @@
       </p:sp>
       <p:sp>
         <p:nvSpPr>
-          <p:cNvPr id="19" name="S10-stepno111"/>
+          <p:cNvPr id="19" name="S10-stepno104"/>
           <p:cNvSpPr txBox="1"/>
           <p:nvPr/>
         </p:nvSpPr>
@@ -4690,7 +4656,7 @@
       </p:sp>
       <p:sp>
         <p:nvSpPr>
-          <p:cNvPr id="20" name="S10-text112"/>
+          <p:cNvPr id="20" name="S10-text105"/>
           <p:cNvSpPr txBox="1"/>
           <p:nvPr/>
         </p:nvSpPr>
@@ -4860,7 +4826,7 @@
       </p:sp>
       <p:sp>
         <p:nvSpPr>
-          <p:cNvPr id="3" name="S11-text113"/>
+          <p:cNvPr id="3" name="S11-text106"/>
           <p:cNvSpPr txBox="1"/>
           <p:nvPr/>
         </p:nvSpPr>
@@ -4899,7 +4865,7 @@
       </p:sp>
       <p:sp>
         <p:nvSpPr>
-          <p:cNvPr id="4" name="S11-card114"/>
+          <p:cNvPr id="4" name="S11-card107"/>
           <p:cNvSpPr/>
           <p:nvPr/>
         </p:nvSpPr>
@@ -4926,7 +4892,7 @@
       </p:sp>
       <p:sp>
         <p:nvSpPr>
-          <p:cNvPr id="5" name="S11-cardtext115"/>
+          <p:cNvPr id="5" name="S11-cardtext108"/>
           <p:cNvSpPr txBox="1"/>
           <p:nvPr/>
         </p:nvSpPr>
@@ -4968,7 +4934,7 @@
       </p:sp>
       <p:graphicFrame>
         <p:nvGraphicFramePr>
-          <p:cNvPr id="12" name="S11-table116"/>
+          <p:cNvPr id="12" name="S11-table109"/>
           <p:cNvGraphicFramePr>
             <a:graphicFrameLocks noGrp="1"/>
           </p:cNvGraphicFramePr>
@@ -5758,7 +5724,7 @@
       </p:sp>
       <p:sp>
         <p:nvSpPr>
-          <p:cNvPr id="3" name="S12-text117"/>
+          <p:cNvPr id="3" name="S12-text110"/>
           <p:cNvSpPr txBox="1"/>
           <p:nvPr/>
         </p:nvSpPr>
@@ -5797,7 +5763,7 @@
       </p:sp>
       <p:sp>
         <p:nvSpPr>
-          <p:cNvPr id="4" name="S12-card118"/>
+          <p:cNvPr id="4" name="S12-card111"/>
           <p:cNvSpPr/>
           <p:nvPr/>
         </p:nvSpPr>
@@ -5824,7 +5790,7 @@
       </p:sp>
       <p:sp>
         <p:nvSpPr>
-          <p:cNvPr id="5" name="S12-cardtext119"/>
+          <p:cNvPr id="5" name="S12-cardtext112"/>
           <p:cNvSpPr txBox="1"/>
           <p:nvPr/>
         </p:nvSpPr>
@@ -5866,7 +5832,7 @@
       </p:sp>
       <p:sp>
         <p:nvSpPr>
-          <p:cNvPr id="6" name="S12-step120"/>
+          <p:cNvPr id="6" name="S12-step113"/>
           <p:cNvSpPr txBox="1"/>
           <p:nvPr/>
         </p:nvSpPr>
@@ -5930,7 +5896,7 @@
       </p:sp>
       <p:sp>
         <p:nvSpPr>
-          <p:cNvPr id="7" name="S12-line121"/>
+          <p:cNvPr id="7" name="S12-line114"/>
           <p:cNvSpPr/>
           <p:nvPr/>
         </p:nvSpPr>
@@ -5954,7 +5920,7 @@
       </p:sp>
       <p:sp>
         <p:nvSpPr>
-          <p:cNvPr id="8" name="S12-step122"/>
+          <p:cNvPr id="8" name="S12-step115"/>
           <p:cNvSpPr txBox="1"/>
           <p:nvPr/>
         </p:nvSpPr>
@@ -6018,7 +5984,7 @@
       </p:sp>
       <p:sp>
         <p:nvSpPr>
-          <p:cNvPr id="9" name="S12-line123"/>
+          <p:cNvPr id="9" name="S12-line116"/>
           <p:cNvSpPr/>
           <p:nvPr/>
         </p:nvSpPr>
@@ -6042,7 +6008,7 @@
       </p:sp>
       <p:sp>
         <p:nvSpPr>
-          <p:cNvPr id="10" name="S12-step124"/>
+          <p:cNvPr id="10" name="S12-step117"/>
           <p:cNvSpPr txBox="1"/>
           <p:nvPr/>
         </p:nvSpPr>
@@ -6106,7 +6072,7 @@
       </p:sp>
       <p:sp>
         <p:nvSpPr>
-          <p:cNvPr id="11" name="S12-line125"/>
+          <p:cNvPr id="11" name="S12-line118"/>
           <p:cNvSpPr/>
           <p:nvPr/>
         </p:nvSpPr>
@@ -6130,7 +6096,7 @@
       </p:sp>
       <p:sp>
         <p:nvSpPr>
-          <p:cNvPr id="12" name="S12-step126"/>
+          <p:cNvPr id="12" name="S12-step119"/>
           <p:cNvSpPr txBox="1"/>
           <p:nvPr/>
         </p:nvSpPr>
@@ -6308,7 +6274,7 @@
       </p:sp>
       <p:sp>
         <p:nvSpPr>
-          <p:cNvPr id="3" name="S13-card127"/>
+          <p:cNvPr id="3" name="S13-card120"/>
           <p:cNvSpPr/>
           <p:nvPr/>
         </p:nvSpPr>
@@ -6335,7 +6301,7 @@
       </p:sp>
       <p:sp>
         <p:nvSpPr>
-          <p:cNvPr id="4" name="S13-cardtext128"/>
+          <p:cNvPr id="4" name="S13-cardtext121"/>
           <p:cNvSpPr txBox="1"/>
           <p:nvPr/>
         </p:nvSpPr>
@@ -6377,7 +6343,7 @@
       </p:sp>
       <p:sp>
         <p:nvSpPr>
-          <p:cNvPr id="5" name="S13-card129"/>
+          <p:cNvPr id="5" name="S13-card122"/>
           <p:cNvSpPr/>
           <p:nvPr/>
         </p:nvSpPr>
@@ -6404,7 +6370,7 @@
       </p:sp>
       <p:sp>
         <p:nvSpPr>
-          <p:cNvPr id="6" name="S13-cardtext130"/>
+          <p:cNvPr id="6" name="S13-cardtext123"/>
           <p:cNvSpPr txBox="1"/>
           <p:nvPr/>
         </p:nvSpPr>
@@ -6446,7 +6412,7 @@
       </p:sp>
       <p:sp>
         <p:nvSpPr>
-          <p:cNvPr id="7" name="S13-chip131"/>
+          <p:cNvPr id="7" name="S13-chip124"/>
           <p:cNvSpPr txBox="1"/>
           <p:nvPr/>
         </p:nvSpPr>
@@ -6493,7 +6459,7 @@
       </p:sp>
       <p:sp>
         <p:nvSpPr>
-          <p:cNvPr id="8" name="S13-text132"/>
+          <p:cNvPr id="8" name="S13-text125"/>
           <p:cNvSpPr txBox="1"/>
           <p:nvPr/>
         </p:nvSpPr>
@@ -6549,7 +6515,7 @@
       </p:sp>
       <p:sp>
         <p:nvSpPr>
-          <p:cNvPr id="9" name="S13-chip133"/>
+          <p:cNvPr id="9" name="S13-chip126"/>
           <p:cNvSpPr txBox="1"/>
           <p:nvPr/>
         </p:nvSpPr>
@@ -6596,7 +6562,7 @@
       </p:sp>
       <p:sp>
         <p:nvSpPr>
-          <p:cNvPr id="10" name="S13-text134"/>
+          <p:cNvPr id="10" name="S13-text127"/>
           <p:cNvSpPr txBox="1"/>
           <p:nvPr/>
         </p:nvSpPr>
@@ -6766,7 +6732,7 @@
       </p:sp>
       <p:sp>
         <p:nvSpPr>
-          <p:cNvPr id="3" name="S14-text135"/>
+          <p:cNvPr id="3" name="S14-text128"/>
           <p:cNvSpPr txBox="1"/>
           <p:nvPr/>
         </p:nvSpPr>
@@ -6805,7 +6771,7 @@
       </p:sp>
       <p:sp>
         <p:nvSpPr>
-          <p:cNvPr id="4" name="S14-card136"/>
+          <p:cNvPr id="4" name="S14-card129"/>
           <p:cNvSpPr/>
           <p:nvPr/>
         </p:nvSpPr>
@@ -6832,7 +6798,7 @@
       </p:sp>
       <p:sp>
         <p:nvSpPr>
-          <p:cNvPr id="5" name="S14-cardtext137"/>
+          <p:cNvPr id="5" name="S14-cardtext130"/>
           <p:cNvSpPr txBox="1"/>
           <p:nvPr/>
         </p:nvSpPr>
@@ -6874,7 +6840,7 @@
       </p:sp>
       <p:sp>
         <p:nvSpPr>
-          <p:cNvPr id="6" name="S14-chip138"/>
+          <p:cNvPr id="6" name="S14-chip131"/>
           <p:cNvSpPr txBox="1"/>
           <p:nvPr/>
         </p:nvSpPr>
@@ -6921,7 +6887,7 @@
       </p:sp>
       <p:sp>
         <p:nvSpPr>
-          <p:cNvPr id="7" name="S14-text139"/>
+          <p:cNvPr id="7" name="S14-text132"/>
           <p:cNvSpPr txBox="1"/>
           <p:nvPr/>
         </p:nvSpPr>
@@ -6960,7 +6926,7 @@
       </p:sp>
       <p:sp>
         <p:nvSpPr>
-          <p:cNvPr id="8" name="S14-chip140"/>
+          <p:cNvPr id="8" name="S14-chip133"/>
           <p:cNvSpPr txBox="1"/>
           <p:nvPr/>
         </p:nvSpPr>
@@ -7007,7 +6973,7 @@
       </p:sp>
       <p:sp>
         <p:nvSpPr>
-          <p:cNvPr id="9" name="S14-text141"/>
+          <p:cNvPr id="9" name="S14-text134"/>
           <p:cNvSpPr txBox="1"/>
           <p:nvPr/>
         </p:nvSpPr>
@@ -7046,7 +7012,7 @@
       </p:sp>
       <p:sp>
         <p:nvSpPr>
-          <p:cNvPr id="10" name="S14-chip142"/>
+          <p:cNvPr id="10" name="S14-chip135"/>
           <p:cNvSpPr txBox="1"/>
           <p:nvPr/>
         </p:nvSpPr>
@@ -7093,7 +7059,7 @@
       </p:sp>
       <p:sp>
         <p:nvSpPr>
-          <p:cNvPr id="11" name="S14-text143"/>
+          <p:cNvPr id="11" name="S14-text136"/>
           <p:cNvSpPr txBox="1"/>
           <p:nvPr/>
         </p:nvSpPr>
@@ -7246,7 +7212,7 @@
       </p:sp>
       <p:sp>
         <p:nvSpPr>
-          <p:cNvPr id="3" name="S15-chip144"/>
+          <p:cNvPr id="3" name="S15-chip137"/>
           <p:cNvSpPr txBox="1"/>
           <p:nvPr/>
         </p:nvSpPr>
@@ -7293,7 +7259,7 @@
       </p:sp>
       <p:sp>
         <p:nvSpPr>
-          <p:cNvPr id="4" name="S15-text145"/>
+          <p:cNvPr id="4" name="S15-text138"/>
           <p:cNvSpPr txBox="1"/>
           <p:nvPr/>
         </p:nvSpPr>
@@ -7349,7 +7315,7 @@
       </p:sp>
       <p:sp>
         <p:nvSpPr>
-          <p:cNvPr id="5" name="S15-chip146"/>
+          <p:cNvPr id="5" name="S15-chip139"/>
           <p:cNvSpPr txBox="1"/>
           <p:nvPr/>
         </p:nvSpPr>
@@ -7396,7 +7362,7 @@
       </p:sp>
       <p:sp>
         <p:nvSpPr>
-          <p:cNvPr id="6" name="S15-text147"/>
+          <p:cNvPr id="6" name="S15-text140"/>
           <p:cNvSpPr txBox="1"/>
           <p:nvPr/>
         </p:nvSpPr>
@@ -7452,7 +7418,7 @@
       </p:sp>
       <p:sp>
         <p:nvSpPr>
-          <p:cNvPr id="7" name="S15-chip148"/>
+          <p:cNvPr id="7" name="S15-chip141"/>
           <p:cNvSpPr txBox="1"/>
           <p:nvPr/>
         </p:nvSpPr>
@@ -7499,7 +7465,7 @@
       </p:sp>
       <p:sp>
         <p:nvSpPr>
-          <p:cNvPr id="8" name="S15-text149"/>
+          <p:cNvPr id="8" name="S15-text142"/>
           <p:cNvSpPr txBox="1"/>
           <p:nvPr/>
         </p:nvSpPr>
@@ -7555,7 +7521,7 @@
       </p:sp>
       <p:sp>
         <p:nvSpPr>
-          <p:cNvPr id="9" name="S15-chip150"/>
+          <p:cNvPr id="9" name="S15-chip143"/>
           <p:cNvSpPr txBox="1"/>
           <p:nvPr/>
         </p:nvSpPr>
@@ -7602,7 +7568,7 @@
       </p:sp>
       <p:sp>
         <p:nvSpPr>
-          <p:cNvPr id="10" name="S15-text151"/>
+          <p:cNvPr id="10" name="S15-text144"/>
           <p:cNvSpPr txBox="1"/>
           <p:nvPr/>
         </p:nvSpPr>
@@ -7772,7 +7738,7 @@
       </p:sp>
       <p:sp>
         <p:nvSpPr>
-          <p:cNvPr id="3" name="S17-text152"/>
+          <p:cNvPr id="3" name="S17-text145"/>
           <p:cNvSpPr txBox="1"/>
           <p:nvPr/>
         </p:nvSpPr>
@@ -7811,7 +7777,7 @@
       </p:sp>
       <p:sp>
         <p:nvSpPr>
-          <p:cNvPr id="4" name="S17-card153"/>
+          <p:cNvPr id="4" name="S17-card146"/>
           <p:cNvSpPr/>
           <p:nvPr/>
         </p:nvSpPr>
@@ -7838,7 +7804,7 @@
       </p:sp>
       <p:sp>
         <p:nvSpPr>
-          <p:cNvPr id="5" name="S17-cardtext154"/>
+          <p:cNvPr id="5" name="S17-cardtext147"/>
           <p:cNvSpPr txBox="1"/>
           <p:nvPr/>
         </p:nvSpPr>
@@ -7880,7 +7846,7 @@
       </p:sp>
       <p:sp>
         <p:nvSpPr>
-          <p:cNvPr id="6" name="S17-chip155"/>
+          <p:cNvPr id="6" name="S17-chip148"/>
           <p:cNvSpPr txBox="1"/>
           <p:nvPr/>
         </p:nvSpPr>
@@ -7927,7 +7893,7 @@
       </p:sp>
       <p:sp>
         <p:nvSpPr>
-          <p:cNvPr id="7" name="S17-card156"/>
+          <p:cNvPr id="7" name="S17-card149"/>
           <p:cNvSpPr/>
           <p:nvPr/>
         </p:nvSpPr>
@@ -7954,7 +7920,7 @@
       </p:sp>
       <p:sp>
         <p:nvSpPr>
-          <p:cNvPr id="8" name="S17-cardtext157"/>
+          <p:cNvPr id="8" name="S17-cardtext150"/>
           <p:cNvSpPr txBox="1"/>
           <p:nvPr/>
         </p:nvSpPr>
@@ -8016,7 +7982,7 @@
       </p:sp>
       <p:sp>
         <p:nvSpPr>
-          <p:cNvPr id="9" name="S17-chip158"/>
+          <p:cNvPr id="9" name="S17-chip151"/>
           <p:cNvSpPr txBox="1"/>
           <p:nvPr/>
         </p:nvSpPr>
@@ -8063,7 +8029,7 @@
       </p:sp>
       <p:sp>
         <p:nvSpPr>
-          <p:cNvPr id="10" name="S17-card159"/>
+          <p:cNvPr id="10" name="S17-card152"/>
           <p:cNvSpPr/>
           <p:nvPr/>
         </p:nvSpPr>
@@ -8090,7 +8056,7 @@
       </p:sp>
       <p:sp>
         <p:nvSpPr>
-          <p:cNvPr id="11" name="S17-cardtext160"/>
+          <p:cNvPr id="11" name="S17-cardtext153"/>
           <p:cNvSpPr txBox="1"/>
           <p:nvPr/>
         </p:nvSpPr>
@@ -8152,7 +8118,7 @@
       </p:sp>
       <p:sp>
         <p:nvSpPr>
-          <p:cNvPr id="12" name="S17-chip161"/>
+          <p:cNvPr id="12" name="S17-chip154"/>
           <p:cNvSpPr txBox="1"/>
           <p:nvPr/>
         </p:nvSpPr>
@@ -8199,7 +8165,7 @@
       </p:sp>
       <p:sp>
         <p:nvSpPr>
-          <p:cNvPr id="13" name="S17-card162"/>
+          <p:cNvPr id="13" name="S17-card155"/>
           <p:cNvSpPr/>
           <p:nvPr/>
         </p:nvSpPr>
@@ -8226,7 +8192,7 @@
       </p:sp>
       <p:sp>
         <p:nvSpPr>
-          <p:cNvPr id="14" name="S17-cardtext163"/>
+          <p:cNvPr id="14" name="S17-cardtext156"/>
           <p:cNvSpPr txBox="1"/>
           <p:nvPr/>
         </p:nvSpPr>
@@ -8402,7 +8368,7 @@
       </p:sp>
       <p:sp>
         <p:nvSpPr>
-          <p:cNvPr id="3" name="S18-card164"/>
+          <p:cNvPr id="3" name="S18-card157"/>
           <p:cNvSpPr/>
           <p:nvPr/>
         </p:nvSpPr>
@@ -8429,7 +8395,7 @@
       </p:sp>
       <p:sp>
         <p:nvSpPr>
-          <p:cNvPr id="4" name="S18-cardtext165"/>
+          <p:cNvPr id="4" name="S18-cardtext158"/>
           <p:cNvSpPr txBox="1"/>
           <p:nvPr/>
         </p:nvSpPr>
@@ -8491,7 +8457,7 @@
       </p:sp>
       <p:sp>
         <p:nvSpPr>
-          <p:cNvPr id="5" name="S18-chip166"/>
+          <p:cNvPr id="5" name="S18-chip159"/>
           <p:cNvSpPr txBox="1"/>
           <p:nvPr/>
         </p:nvSpPr>
@@ -8538,7 +8504,7 @@
       </p:sp>
       <p:sp>
         <p:nvSpPr>
-          <p:cNvPr id="6" name="S18-chip167"/>
+          <p:cNvPr id="6" name="S18-chip160"/>
           <p:cNvSpPr txBox="1"/>
           <p:nvPr/>
         </p:nvSpPr>
@@ -8585,7 +8551,7 @@
       </p:sp>
       <p:sp>
         <p:nvSpPr>
-          <p:cNvPr id="7" name="S18-text168"/>
+          <p:cNvPr id="7" name="S18-text161"/>
           <p:cNvSpPr txBox="1"/>
           <p:nvPr/>
         </p:nvSpPr>
@@ -8624,7 +8590,7 @@
       </p:sp>
       <p:sp>
         <p:nvSpPr>
-          <p:cNvPr id="8" name="S18-text169"/>
+          <p:cNvPr id="8" name="S18-text162"/>
           <p:cNvSpPr txBox="1"/>
           <p:nvPr/>
         </p:nvSpPr>
@@ -8680,7 +8646,7 @@
       </p:sp>
       <p:sp>
         <p:nvSpPr>
-          <p:cNvPr id="9" name="S18-text170"/>
+          <p:cNvPr id="9" name="S18-text163"/>
           <p:cNvSpPr txBox="1"/>
           <p:nvPr/>
         </p:nvSpPr>
@@ -8736,7 +8702,7 @@
       </p:sp>
       <p:sp>
         <p:nvSpPr>
-          <p:cNvPr id="10" name="S18-text171"/>
+          <p:cNvPr id="10" name="S18-text164"/>
           <p:cNvSpPr txBox="1"/>
           <p:nvPr/>
         </p:nvSpPr>
@@ -8792,7 +8758,7 @@
       </p:sp>
       <p:sp>
         <p:nvSpPr>
-          <p:cNvPr id="11" name="S18-text172"/>
+          <p:cNvPr id="11" name="S18-text165"/>
           <p:cNvSpPr txBox="1"/>
           <p:nvPr/>
         </p:nvSpPr>
@@ -8945,7 +8911,7 @@
       </p:sp>
       <p:sp>
         <p:nvSpPr>
-          <p:cNvPr id="3" name="S19-text173"/>
+          <p:cNvPr id="3" name="S19-text166"/>
           <p:cNvSpPr txBox="1"/>
           <p:nvPr/>
         </p:nvSpPr>
@@ -8984,7 +8950,7 @@
       </p:sp>
       <p:sp>
         <p:nvSpPr>
-          <p:cNvPr id="4" name="S19-card174"/>
+          <p:cNvPr id="4" name="S19-card167"/>
           <p:cNvSpPr/>
           <p:nvPr/>
         </p:nvSpPr>
@@ -9011,7 +8977,7 @@
       </p:sp>
       <p:sp>
         <p:nvSpPr>
-          <p:cNvPr id="5" name="S19-cardtext175"/>
+          <p:cNvPr id="5" name="S19-cardtext168"/>
           <p:cNvSpPr txBox="1"/>
           <p:nvPr/>
         </p:nvSpPr>
@@ -9053,7 +9019,7 @@
       </p:sp>
       <p:sp>
         <p:nvSpPr>
-          <p:cNvPr id="6" name="S19-card176"/>
+          <p:cNvPr id="6" name="S19-card169"/>
           <p:cNvSpPr/>
           <p:nvPr/>
         </p:nvSpPr>
@@ -9080,7 +9046,7 @@
       </p:sp>
       <p:sp>
         <p:nvSpPr>
-          <p:cNvPr id="7" name="S19-cardtext177"/>
+          <p:cNvPr id="7" name="S19-cardtext170"/>
           <p:cNvSpPr txBox="1"/>
           <p:nvPr/>
         </p:nvSpPr>
@@ -9142,7 +9108,7 @@
       </p:sp>
       <p:sp>
         <p:nvSpPr>
-          <p:cNvPr id="8" name="S19-card178"/>
+          <p:cNvPr id="8" name="S19-card171"/>
           <p:cNvSpPr/>
           <p:nvPr/>
         </p:nvSpPr>
@@ -9169,7 +9135,7 @@
       </p:sp>
       <p:sp>
         <p:nvSpPr>
-          <p:cNvPr id="9" name="S19-cardtext179"/>
+          <p:cNvPr id="9" name="S19-cardtext172"/>
           <p:cNvSpPr txBox="1"/>
           <p:nvPr/>
         </p:nvSpPr>
@@ -9231,7 +9197,7 @@
       </p:sp>
       <p:sp>
         <p:nvSpPr>
-          <p:cNvPr id="10" name="S19-card180"/>
+          <p:cNvPr id="10" name="S19-card173"/>
           <p:cNvSpPr/>
           <p:nvPr/>
         </p:nvSpPr>
@@ -9258,7 +9224,7 @@
       </p:sp>
       <p:sp>
         <p:nvSpPr>
-          <p:cNvPr id="11" name="S19-cardtext181"/>
+          <p:cNvPr id="11" name="S19-cardtext174"/>
           <p:cNvSpPr txBox="1"/>
           <p:nvPr/>
         </p:nvSpPr>
@@ -9340,7 +9306,7 @@
       </p:sp>
       <p:sp>
         <p:nvSpPr>
-          <p:cNvPr id="12" name="S19-card182"/>
+          <p:cNvPr id="12" name="S19-card175"/>
           <p:cNvSpPr/>
           <p:nvPr/>
         </p:nvSpPr>
@@ -9367,7 +9333,7 @@
       </p:sp>
       <p:sp>
         <p:nvSpPr>
-          <p:cNvPr id="13" name="S19-cardtext183"/>
+          <p:cNvPr id="13" name="S19-cardtext176"/>
           <p:cNvSpPr txBox="1"/>
           <p:nvPr/>
         </p:nvSpPr>
@@ -11272,14 +11238,14 @@
       </p:sp>
       <p:sp>
         <p:nvSpPr>
-          <p:cNvPr id="5" name="S05-figure39" descr="왼쪽: 비닐 랩으로 싼 막대자석. 오른쪽: 그릇 위에 올린 체(구멍이 있는 망)"/>
+          <p:cNvPr id="5" name="S05-figure39" descr="왼쪽: 비닐 랩(점선)으로 싼 막대자석. 오른쪽: 그릇 위에 올린 체(구멍이 있는 망)"/>
           <p:cNvSpPr/>
           <p:nvPr/>
         </p:nvSpPr>
         <p:spPr>
           <a:xfrm>
-            <a:off x="7823934" y="2005995"/>
-            <a:ext cx="350762" cy="210457"/>
+            <a:off x="7059996" y="2065038"/>
+            <a:ext cx="541747" cy="325048"/>
           </a:xfrm>
           <a:custGeom>
             <a:avLst/>
@@ -11288,15 +11254,15 @@
             <a:cxnLst/>
             <a:rect l="l" t="t" r="r" b="b"/>
             <a:pathLst>
-              <a:path w="350762" h="210457">
+              <a:path w="541747" h="325048">
                 <a:moveTo>
-                  <a:pt x="0" y="210457"/>
+                  <a:pt x="0" y="325048"/>
                 </a:moveTo>
                 <a:lnTo>
-                  <a:pt x="350762" y="210457"/>
+                  <a:pt x="541747" y="325048"/>
                 </a:lnTo>
                 <a:lnTo>
-                  <a:pt x="350762" y="0"/>
+                  <a:pt x="541747" y="0"/>
                 </a:lnTo>
                 <a:lnTo>
                   <a:pt x="0" y="0"/>
@@ -11324,8 +11290,8 @@
         </p:nvSpPr>
         <p:spPr>
           <a:xfrm>
-            <a:off x="8174696" y="2005995"/>
-            <a:ext cx="350762" cy="210457"/>
+            <a:off x="7601742" y="2065038"/>
+            <a:ext cx="541747" cy="325048"/>
           </a:xfrm>
           <a:custGeom>
             <a:avLst/>
@@ -11334,15 +11300,15 @@
             <a:cxnLst/>
             <a:rect l="l" t="t" r="r" b="b"/>
             <a:pathLst>
-              <a:path w="350762" h="210457">
+              <a:path w="541747" h="325048">
                 <a:moveTo>
-                  <a:pt x="0" y="210457"/>
+                  <a:pt x="0" y="325048"/>
                 </a:moveTo>
                 <a:lnTo>
-                  <a:pt x="350762" y="210457"/>
+                  <a:pt x="541747" y="325048"/>
                 </a:lnTo>
                 <a:lnTo>
-                  <a:pt x="350762" y="0"/>
+                  <a:pt x="541747" y="0"/>
                 </a:lnTo>
                 <a:lnTo>
                   <a:pt x="0" y="0"/>
@@ -11370,8 +11336,8 @@
         </p:nvSpPr>
         <p:spPr>
           <a:xfrm>
-            <a:off x="7771320" y="1953381"/>
-            <a:ext cx="806752" cy="315686"/>
+            <a:off x="6978734" y="1983776"/>
+            <a:ext cx="1246017" cy="487572"/>
           </a:xfrm>
           <a:custGeom>
             <a:avLst/>
@@ -11380,15 +11346,15 @@
             <a:cxnLst/>
             <a:rect l="l" t="t" r="r" b="b"/>
             <a:pathLst>
-              <a:path w="806752" h="315686">
+              <a:path w="1246017" h="487572">
                 <a:moveTo>
-                  <a:pt x="0" y="315686"/>
+                  <a:pt x="0" y="487572"/>
                 </a:moveTo>
                 <a:lnTo>
-                  <a:pt x="806752" y="315686"/>
+                  <a:pt x="1246017" y="487572"/>
                 </a:lnTo>
                 <a:lnTo>
-                  <a:pt x="806752" y="0"/>
+                  <a:pt x="1246017" y="0"/>
                 </a:lnTo>
                 <a:lnTo>
                   <a:pt x="0" y="0"/>
@@ -11414,8 +11380,8 @@
         </p:nvSpPr>
         <p:spPr>
           <a:xfrm>
-            <a:off x="9226982" y="2251529"/>
-            <a:ext cx="1122438" cy="420914"/>
+            <a:off x="9226982" y="2281737"/>
+            <a:ext cx="1733589" cy="541747"/>
           </a:xfrm>
           <a:custGeom>
             <a:avLst/>
@@ -11424,81 +11390,81 @@
             <a:cxnLst/>
             <a:rect l="l" t="t" r="r" b="b"/>
             <a:pathLst>
-              <a:path w="1122438" h="420914">
+              <a:path w="1733589" h="541747">
                 <a:moveTo>
                   <a:pt x="0" y="0"/>
                 </a:moveTo>
                 <a:lnTo>
-                  <a:pt x="4911" y="55070"/>
+                  <a:pt x="7584" y="70969"/>
                 </a:lnTo>
                 <a:lnTo>
-                  <a:pt x="19292" y="109087"/>
+                  <a:pt x="29796" y="140312"/>
                 </a:lnTo>
                 <a:lnTo>
-                  <a:pt x="42793" y="161000"/>
+                  <a:pt x="66093" y="207489"/>
                 </a:lnTo>
                 <a:lnTo>
-                  <a:pt x="75063" y="210457"/>
+                  <a:pt x="115934" y="270873"/>
                 </a:lnTo>
                 <a:lnTo>
-                  <a:pt x="116102" y="256407"/>
+                  <a:pt x="179318" y="329924"/>
                 </a:lnTo>
                 <a:lnTo>
-                  <a:pt x="164507" y="297797"/>
+                  <a:pt x="254079" y="383015"/>
                 </a:lnTo>
                 <a:lnTo>
-                  <a:pt x="219577" y="333925"/>
+                  <a:pt x="339133" y="429605"/>
                 </a:lnTo>
                 <a:lnTo>
-                  <a:pt x="280610" y="364442"/>
+                  <a:pt x="433397" y="469153"/>
                 </a:lnTo>
                 <a:lnTo>
-                  <a:pt x="346553" y="388995"/>
+                  <a:pt x="535246" y="500574"/>
                 </a:lnTo>
                 <a:lnTo>
-                  <a:pt x="416004" y="406533"/>
+                  <a:pt x="642511" y="523327"/>
                 </a:lnTo>
                 <a:lnTo>
-                  <a:pt x="487910" y="417407"/>
+                  <a:pt x="753569" y="536871"/>
                 </a:lnTo>
                 <a:lnTo>
-                  <a:pt x="561219" y="420914"/>
+                  <a:pt x="866794" y="541747"/>
                 </a:lnTo>
                 <a:lnTo>
-                  <a:pt x="634528" y="417407"/>
+                  <a:pt x="980020" y="536871"/>
                 </a:lnTo>
                 <a:lnTo>
-                  <a:pt x="706434" y="406533"/>
+                  <a:pt x="1091078" y="523327"/>
                 </a:lnTo>
                 <a:lnTo>
-                  <a:pt x="775885" y="388995"/>
+                  <a:pt x="1198343" y="500574"/>
                 </a:lnTo>
                 <a:lnTo>
-                  <a:pt x="841829" y="364442"/>
+                  <a:pt x="1300192" y="469153"/>
                 </a:lnTo>
                 <a:lnTo>
-                  <a:pt x="902861" y="333925"/>
+                  <a:pt x="1394456" y="429605"/>
                 </a:lnTo>
                 <a:lnTo>
-                  <a:pt x="957931" y="297797"/>
+                  <a:pt x="1479510" y="383015"/>
                 </a:lnTo>
                 <a:lnTo>
-                  <a:pt x="1006336" y="256407"/>
+                  <a:pt x="1554271" y="329924"/>
                 </a:lnTo>
                 <a:lnTo>
-                  <a:pt x="1047375" y="210457"/>
+                  <a:pt x="1617655" y="270873"/>
                 </a:lnTo>
                 <a:lnTo>
-                  <a:pt x="1079645" y="161000"/>
+                  <a:pt x="1667496" y="207489"/>
                 </a:lnTo>
                 <a:lnTo>
-                  <a:pt x="1103146" y="109087"/>
+                  <a:pt x="1703793" y="140312"/>
                 </a:lnTo>
                 <a:lnTo>
-                  <a:pt x="1117527" y="55070"/>
+                  <a:pt x="1726005" y="70969"/>
                 </a:lnTo>
                 <a:lnTo>
-                  <a:pt x="1122438" y="0"/>
+                  <a:pt x="1733589" y="0"/>
                 </a:lnTo>
                 <a:close/>
               </a:path>
@@ -11523,8 +11489,8 @@
         </p:nvSpPr>
         <p:spPr>
           <a:xfrm>
-            <a:off x="9349748" y="1900767"/>
-            <a:ext cx="876905" cy="350762"/>
+            <a:off x="9416593" y="1929601"/>
+            <a:ext cx="1354366" cy="460485"/>
           </a:xfrm>
           <a:custGeom>
             <a:avLst/>
@@ -11533,81 +11499,81 @@
             <a:cxnLst/>
             <a:rect l="l" t="t" r="r" b="b"/>
             <a:pathLst>
-              <a:path w="876905" h="350762">
+              <a:path w="1354366" h="460485">
                 <a:moveTo>
                   <a:pt x="0" y="0"/>
                 </a:moveTo>
                 <a:lnTo>
-                  <a:pt x="3858" y="45950"/>
+                  <a:pt x="5959" y="60134"/>
                 </a:lnTo>
                 <a:lnTo>
-                  <a:pt x="15083" y="90847"/>
+                  <a:pt x="23295" y="119184"/>
                 </a:lnTo>
                 <a:lnTo>
-                  <a:pt x="33322" y="134342"/>
+                  <a:pt x="51466" y="176068"/>
                 </a:lnTo>
                 <a:lnTo>
-                  <a:pt x="58577" y="175381"/>
+                  <a:pt x="90472" y="230242"/>
                 </a:lnTo>
                 <a:lnTo>
-                  <a:pt x="90497" y="213614"/>
+                  <a:pt x="139771" y="280083"/>
                 </a:lnTo>
                 <a:lnTo>
-                  <a:pt x="128379" y="247989"/>
+                  <a:pt x="198279" y="325590"/>
                 </a:lnTo>
                 <a:lnTo>
-                  <a:pt x="171523" y="278154"/>
+                  <a:pt x="264914" y="365137"/>
                 </a:lnTo>
                 <a:lnTo>
-                  <a:pt x="219226" y="303760"/>
+                  <a:pt x="338592" y="398725"/>
                 </a:lnTo>
                 <a:lnTo>
-                  <a:pt x="270788" y="324104"/>
+                  <a:pt x="418228" y="425271"/>
                 </a:lnTo>
                 <a:lnTo>
-                  <a:pt x="324806" y="338836"/>
+                  <a:pt x="501657" y="444774"/>
                 </a:lnTo>
                 <a:lnTo>
-                  <a:pt x="381278" y="347605"/>
+                  <a:pt x="588879" y="456692"/>
                 </a:lnTo>
                 <a:lnTo>
-                  <a:pt x="438452" y="350762"/>
+                  <a:pt x="677183" y="460485"/>
                 </a:lnTo>
                 <a:lnTo>
-                  <a:pt x="495627" y="347605"/>
+                  <a:pt x="765488" y="456692"/>
                 </a:lnTo>
                 <a:lnTo>
-                  <a:pt x="552099" y="338836"/>
+                  <a:pt x="852709" y="444774"/>
                 </a:lnTo>
                 <a:lnTo>
-                  <a:pt x="606117" y="324104"/>
+                  <a:pt x="936138" y="425271"/>
                 </a:lnTo>
                 <a:lnTo>
-                  <a:pt x="657679" y="303760"/>
+                  <a:pt x="1015775" y="398725"/>
                 </a:lnTo>
                 <a:lnTo>
-                  <a:pt x="705382" y="278154"/>
+                  <a:pt x="1089452" y="365137"/>
                 </a:lnTo>
                 <a:lnTo>
-                  <a:pt x="748526" y="247989"/>
+                  <a:pt x="1156087" y="325590"/>
                 </a:lnTo>
                 <a:lnTo>
-                  <a:pt x="786408" y="213614"/>
+                  <a:pt x="1214596" y="280083"/>
                 </a:lnTo>
                 <a:lnTo>
-                  <a:pt x="818328" y="175381"/>
+                  <a:pt x="1263895" y="230242"/>
                 </a:lnTo>
                 <a:lnTo>
-                  <a:pt x="843582" y="134342"/>
+                  <a:pt x="1302900" y="176068"/>
                 </a:lnTo>
                 <a:lnTo>
-                  <a:pt x="861822" y="90847"/>
+                  <a:pt x="1331071" y="119184"/>
                 </a:lnTo>
                 <a:lnTo>
-                  <a:pt x="873046" y="45950"/>
+                  <a:pt x="1348407" y="60134"/>
                 </a:lnTo>
                 <a:lnTo>
-                  <a:pt x="876905" y="0"/>
+                  <a:pt x="1354366" y="0"/>
                 </a:lnTo>
                 <a:close/>
               </a:path>
@@ -11630,8 +11596,8 @@
         </p:nvSpPr>
         <p:spPr>
           <a:xfrm>
-            <a:off x="9525129" y="1900767"/>
-            <a:ext cx="0" cy="280610"/>
+            <a:off x="9687466" y="1929601"/>
+            <a:ext cx="0" cy="368388"/>
           </a:xfrm>
           <a:prstGeom prst="line">
             <a:avLst/>
@@ -11653,8 +11619,8 @@
         </p:nvSpPr>
         <p:spPr>
           <a:xfrm>
-            <a:off x="9700510" y="1900767"/>
-            <a:ext cx="0" cy="343747"/>
+            <a:off x="9958340" y="1929601"/>
+            <a:ext cx="0" cy="451275"/>
           </a:xfrm>
           <a:prstGeom prst="line">
             <a:avLst/>
@@ -11676,8 +11642,8 @@
         </p:nvSpPr>
         <p:spPr>
           <a:xfrm>
-            <a:off x="9875891" y="1900767"/>
-            <a:ext cx="0" cy="343747"/>
+            <a:off x="10229213" y="1929601"/>
+            <a:ext cx="0" cy="451275"/>
           </a:xfrm>
           <a:prstGeom prst="line">
             <a:avLst/>
@@ -11699,8 +11665,8 @@
         </p:nvSpPr>
         <p:spPr>
           <a:xfrm>
-            <a:off x="10051272" y="1900767"/>
-            <a:ext cx="0" cy="280610"/>
+            <a:off x="10500086" y="1929601"/>
+            <a:ext cx="0" cy="368388"/>
           </a:xfrm>
           <a:prstGeom prst="line">
             <a:avLst/>
@@ -11722,8 +11688,8 @@
         </p:nvSpPr>
         <p:spPr>
           <a:xfrm>
-            <a:off x="9454977" y="2128762"/>
-            <a:ext cx="666448" cy="0"/>
+            <a:off x="9577492" y="2227562"/>
+            <a:ext cx="1032569" cy="0"/>
           </a:xfrm>
           <a:prstGeom prst="line">
             <a:avLst/>
@@ -11745,8 +11711,8 @@
         </p:nvSpPr>
         <p:spPr>
           <a:xfrm>
-            <a:off x="9377459" y="2023533"/>
-            <a:ext cx="821484" cy="0"/>
+            <a:off x="9451807" y="2075873"/>
+            <a:ext cx="1283939" cy="0"/>
           </a:xfrm>
           <a:prstGeom prst="line">
             <a:avLst/>
@@ -11768,8 +11734,8 @@
         </p:nvSpPr>
         <p:spPr>
           <a:xfrm>
-            <a:off x="9349748" y="1900767"/>
-            <a:ext cx="876905" cy="0"/>
+            <a:off x="9416593" y="1929601"/>
+            <a:ext cx="1354366" cy="0"/>
           </a:xfrm>
           <a:prstGeom prst="line">
             <a:avLst/>
@@ -11791,8 +11757,8 @@
         </p:nvSpPr>
         <p:spPr>
           <a:xfrm flipV="1">
-            <a:off x="10226653" y="1795538"/>
-            <a:ext cx="473529" cy="105229"/>
+            <a:off x="10770959" y="1767077"/>
+            <a:ext cx="731358" cy="162524"/>
           </a:xfrm>
           <a:prstGeom prst="line">
             <a:avLst/>
@@ -11814,8 +11780,8 @@
         </p:nvSpPr>
         <p:spPr>
           <a:xfrm>
-            <a:off x="7852249" y="1936599"/>
-            <a:ext cx="294132" cy="349250"/>
+            <a:off x="7273066" y="1484103"/>
+            <a:ext cx="657352" cy="349250"/>
           </a:xfrm>
           <a:prstGeom prst="rect">
             <a:avLst/>
@@ -11831,7 +11797,7 @@
               <a:buNone/>
             </a:pPr>
             <a:r>
-              <a:rPr lang="en-US" altLang="ko-KR" sz="2200" b="1" dirty="0">
+              <a:rPr lang="ko-KR" altLang="en-US" sz="2200" b="1" dirty="0">
                 <a:solidFill>
                   <a:srgbClr val="1F2937"/>
                 </a:solidFill>
@@ -11839,7 +11805,7 @@
                 <a:ea typeface="맑은 고딕" pitchFamily="34" charset="-122"/>
                 <a:cs typeface="맑은 고딕" pitchFamily="34" charset="-120"/>
               </a:rPr>
-              <a:t>N</a:t>
+              <a:t>자석</a:t>
             </a:r>
             <a:endParaRPr lang="ko-KR" sz="2200" dirty="0"/>
           </a:p>
@@ -11853,8 +11819,8 @@
         </p:nvSpPr>
         <p:spPr>
           <a:xfrm>
-            <a:off x="8203011" y="1936599"/>
-            <a:ext cx="294132" cy="349250"/>
+            <a:off x="9902006" y="1457016"/>
+            <a:ext cx="383540" cy="349250"/>
           </a:xfrm>
           <a:prstGeom prst="rect">
             <a:avLst/>
@@ -11870,7 +11836,7 @@
               <a:buNone/>
             </a:pPr>
             <a:r>
-              <a:rPr lang="en-US" altLang="ko-KR" sz="2200" b="1" dirty="0">
+              <a:rPr lang="ko-KR" altLang="en-US" sz="2200" b="1" dirty="0">
                 <a:solidFill>
                   <a:srgbClr val="1F2937"/>
                 </a:solidFill>
@@ -11878,7 +11844,7 @@
                 <a:ea typeface="맑은 고딕" pitchFamily="34" charset="-122"/>
                 <a:cs typeface="맑은 고딕" pitchFamily="34" charset="-120"/>
               </a:rPr>
-              <a:t>S</a:t>
+              <a:t>체</a:t>
             </a:r>
             <a:endParaRPr lang="ko-KR" sz="2200" dirty="0"/>
           </a:p>
@@ -11886,124 +11852,7 @@
       </p:sp>
       <p:sp>
         <p:nvSpPr>
-          <p:cNvPr id="20" name="S05-label57"/>
-          <p:cNvSpPr txBox="1"/>
-          <p:nvPr/>
-        </p:nvSpPr>
-        <p:spPr>
-          <a:xfrm>
-            <a:off x="7214576" y="1533223"/>
-            <a:ext cx="1920240" cy="349250"/>
-          </a:xfrm>
-          <a:prstGeom prst="rect">
-            <a:avLst/>
-          </a:prstGeom>
-          <a:noFill/>
-          <a:ln/>
-        </p:spPr>
-        <p:txBody>
-          <a:bodyPr wrap="square" lIns="0" tIns="0" rIns="0" bIns="0" rtlCol="0" anchor="ctr"/>
-          <a:lstStyle/>
-          <a:p>
-            <a:pPr eaLnBrk="0" algn="ctr" indent="0" marL="0">
-              <a:buNone/>
-            </a:pPr>
-            <a:r>
-              <a:rPr lang="ko-KR" altLang="en-US" sz="2200" b="1" dirty="0">
-                <a:solidFill>
-                  <a:srgbClr val="1F2937"/>
-                </a:solidFill>
-                <a:latin typeface="맑은 고딕" pitchFamily="34" charset="0"/>
-                <a:ea typeface="맑은 고딕" pitchFamily="34" charset="-122"/>
-                <a:cs typeface="맑은 고딕" pitchFamily="34" charset="-120"/>
-              </a:rPr>
-              <a:t>랩으로 싼 자석</a:t>
-            </a:r>
-            <a:endParaRPr lang="ko-KR" sz="2200" dirty="0"/>
-          </a:p>
-        </p:txBody>
-      </p:sp>
-      <p:sp>
-        <p:nvSpPr>
-          <p:cNvPr id="21" name="S05-label59"/>
-          <p:cNvSpPr txBox="1"/>
-          <p:nvPr/>
-        </p:nvSpPr>
-        <p:spPr>
-          <a:xfrm>
-            <a:off x="9596431" y="1427994"/>
-            <a:ext cx="383540" cy="349250"/>
-          </a:xfrm>
-          <a:prstGeom prst="rect">
-            <a:avLst/>
-          </a:prstGeom>
-          <a:noFill/>
-          <a:ln/>
-        </p:spPr>
-        <p:txBody>
-          <a:bodyPr wrap="square" lIns="0" tIns="0" rIns="0" bIns="0" rtlCol="0" anchor="ctr"/>
-          <a:lstStyle/>
-          <a:p>
-            <a:pPr eaLnBrk="0" algn="ctr" indent="0" marL="0">
-              <a:buNone/>
-            </a:pPr>
-            <a:r>
-              <a:rPr lang="ko-KR" altLang="en-US" sz="2200" b="1" dirty="0">
-                <a:solidFill>
-                  <a:srgbClr val="1F2937"/>
-                </a:solidFill>
-                <a:latin typeface="맑은 고딕" pitchFamily="34" charset="0"/>
-                <a:ea typeface="맑은 고딕" pitchFamily="34" charset="-122"/>
-                <a:cs typeface="맑은 고딕" pitchFamily="34" charset="-120"/>
-              </a:rPr>
-              <a:t>체</a:t>
-            </a:r>
-            <a:endParaRPr lang="ko-KR" sz="2200" dirty="0"/>
-          </a:p>
-        </p:txBody>
-      </p:sp>
-      <p:sp>
-        <p:nvSpPr>
-          <p:cNvPr id="22" name="S05-label61"/>
-          <p:cNvSpPr txBox="1"/>
-          <p:nvPr/>
-        </p:nvSpPr>
-        <p:spPr>
-          <a:xfrm>
-            <a:off x="9459525" y="2620585"/>
-            <a:ext cx="657352" cy="349250"/>
-          </a:xfrm>
-          <a:prstGeom prst="rect">
-            <a:avLst/>
-          </a:prstGeom>
-          <a:noFill/>
-          <a:ln/>
-        </p:spPr>
-        <p:txBody>
-          <a:bodyPr wrap="square" lIns="0" tIns="0" rIns="0" bIns="0" rtlCol="0" anchor="ctr"/>
-          <a:lstStyle/>
-          <a:p>
-            <a:pPr eaLnBrk="0" algn="ctr" indent="0" marL="0">
-              <a:buNone/>
-            </a:pPr>
-            <a:r>
-              <a:rPr lang="ko-KR" altLang="en-US" sz="2200" b="1" dirty="0">
-                <a:solidFill>
-                  <a:srgbClr val="1F2937"/>
-                </a:solidFill>
-                <a:latin typeface="맑은 고딕" pitchFamily="34" charset="0"/>
-                <a:ea typeface="맑은 고딕" pitchFamily="34" charset="-122"/>
-                <a:cs typeface="맑은 고딕" pitchFamily="34" charset="-120"/>
-              </a:rPr>
-              <a:t>그릇</a:t>
-            </a:r>
-            <a:endParaRPr lang="ko-KR" sz="2200" dirty="0"/>
-          </a:p>
-        </p:txBody>
-      </p:sp>
-      <p:sp>
-        <p:nvSpPr>
-          <p:cNvPr id="23" name="S05-card62"/>
+          <p:cNvPr id="20" name="S05-card56"/>
           <p:cNvSpPr/>
           <p:nvPr/>
         </p:nvSpPr>
@@ -12030,7 +11879,7 @@
       </p:sp>
       <p:sp>
         <p:nvSpPr>
-          <p:cNvPr id="24" name="S05-cardtext63"/>
+          <p:cNvPr id="21" name="S05-cardtext57"/>
           <p:cNvSpPr txBox="1"/>
           <p:nvPr/>
         </p:nvSpPr>
@@ -12112,7 +11961,7 @@
       </p:sp>
       <p:sp>
         <p:nvSpPr>
-          <p:cNvPr id="25" name="S05-stepno64"/>
+          <p:cNvPr id="22" name="S05-stepno58"/>
           <p:cNvSpPr txBox="1"/>
           <p:nvPr/>
         </p:nvSpPr>
@@ -12157,7 +12006,7 @@
       </p:sp>
       <p:sp>
         <p:nvSpPr>
-          <p:cNvPr id="26" name="S05-text65"/>
+          <p:cNvPr id="23" name="S05-text59"/>
           <p:cNvSpPr txBox="1"/>
           <p:nvPr/>
         </p:nvSpPr>
@@ -12213,7 +12062,7 @@
       </p:sp>
       <p:sp>
         <p:nvSpPr>
-          <p:cNvPr id="27" name="S05-stepno66"/>
+          <p:cNvPr id="24" name="S05-stepno60"/>
           <p:cNvSpPr txBox="1"/>
           <p:nvPr/>
         </p:nvSpPr>
@@ -12258,7 +12107,7 @@
       </p:sp>
       <p:sp>
         <p:nvSpPr>
-          <p:cNvPr id="28" name="S05-text67"/>
+          <p:cNvPr id="25" name="S05-text61"/>
           <p:cNvSpPr txBox="1"/>
           <p:nvPr/>
         </p:nvSpPr>
@@ -12314,7 +12163,7 @@
       </p:sp>
       <p:sp>
         <p:nvSpPr>
-          <p:cNvPr id="29" name="S05-stepno68"/>
+          <p:cNvPr id="26" name="S05-stepno62"/>
           <p:cNvSpPr txBox="1"/>
           <p:nvPr/>
         </p:nvSpPr>
@@ -12359,7 +12208,7 @@
       </p:sp>
       <p:sp>
         <p:nvSpPr>
-          <p:cNvPr id="30" name="S05-text69"/>
+          <p:cNvPr id="27" name="S05-text63"/>
           <p:cNvSpPr txBox="1"/>
           <p:nvPr/>
         </p:nvSpPr>
@@ -12415,7 +12264,7 @@
       </p:sp>
       <p:sp>
         <p:nvSpPr>
-          <p:cNvPr id="31" name="S05-stepno70"/>
+          <p:cNvPr id="28" name="S05-stepno64"/>
           <p:cNvSpPr txBox="1"/>
           <p:nvPr/>
         </p:nvSpPr>
@@ -12460,7 +12309,7 @@
       </p:sp>
       <p:sp>
         <p:nvSpPr>
-          <p:cNvPr id="32" name="S05-text71"/>
+          <p:cNvPr id="29" name="S05-text65"/>
           <p:cNvSpPr txBox="1"/>
           <p:nvPr/>
         </p:nvSpPr>
@@ -12630,7 +12479,7 @@
       </p:sp>
       <p:sp>
         <p:nvSpPr>
-          <p:cNvPr id="3" name="S06-text72"/>
+          <p:cNvPr id="3" name="S06-text66"/>
           <p:cNvSpPr txBox="1"/>
           <p:nvPr/>
         </p:nvSpPr>
@@ -12669,7 +12518,7 @@
       </p:sp>
       <p:sp>
         <p:nvSpPr>
-          <p:cNvPr id="4" name="S06-card73"/>
+          <p:cNvPr id="4" name="S06-card67"/>
           <p:cNvSpPr/>
           <p:nvPr/>
         </p:nvSpPr>
@@ -12696,7 +12545,7 @@
       </p:sp>
       <p:sp>
         <p:nvSpPr>
-          <p:cNvPr id="5" name="S06-cardtext74"/>
+          <p:cNvPr id="5" name="S06-cardtext68"/>
           <p:cNvSpPr txBox="1"/>
           <p:nvPr/>
         </p:nvSpPr>
@@ -12738,7 +12587,7 @@
       </p:sp>
       <p:graphicFrame>
         <p:nvGraphicFramePr>
-          <p:cNvPr id="7" name="S06-table75"/>
+          <p:cNvPr id="7" name="S06-table69"/>
           <p:cNvGraphicFramePr>
             <a:graphicFrameLocks noGrp="1"/>
           </p:cNvGraphicFramePr>
@@ -13641,7 +13490,7 @@
       </p:sp>
       <p:sp>
         <p:nvSpPr>
-          <p:cNvPr id="3" name="S07-text76"/>
+          <p:cNvPr id="3" name="S07-text70"/>
           <p:cNvSpPr txBox="1"/>
           <p:nvPr/>
         </p:nvSpPr>
@@ -13680,7 +13529,7 @@
       </p:sp>
       <p:sp>
         <p:nvSpPr>
-          <p:cNvPr id="4" name="S07-card77"/>
+          <p:cNvPr id="4" name="S07-card71"/>
           <p:cNvSpPr/>
           <p:nvPr/>
         </p:nvSpPr>
@@ -13707,7 +13556,7 @@
       </p:sp>
       <p:sp>
         <p:nvSpPr>
-          <p:cNvPr id="5" name="S07-cardtext78"/>
+          <p:cNvPr id="5" name="S07-cardtext72"/>
           <p:cNvSpPr txBox="1"/>
           <p:nvPr/>
         </p:nvSpPr>
@@ -13749,7 +13598,7 @@
       </p:sp>
       <p:graphicFrame>
         <p:nvGraphicFramePr>
-          <p:cNvPr id="8" name="S07-table79"/>
+          <p:cNvPr id="8" name="S07-table73"/>
           <p:cNvGraphicFramePr>
             <a:graphicFrameLocks noGrp="1"/>
           </p:cNvGraphicFramePr>
@@ -14512,7 +14361,7 @@
       </p:sp>
       <p:sp>
         <p:nvSpPr>
-          <p:cNvPr id="3" name="S08-card80"/>
+          <p:cNvPr id="3" name="S08-card74"/>
           <p:cNvSpPr/>
           <p:nvPr/>
         </p:nvSpPr>
@@ -14539,7 +14388,7 @@
       </p:sp>
       <p:sp>
         <p:nvSpPr>
-          <p:cNvPr id="4" name="S08-cardtext81"/>
+          <p:cNvPr id="4" name="S08-cardtext75"/>
           <p:cNvSpPr txBox="1"/>
           <p:nvPr/>
         </p:nvSpPr>
@@ -14581,7 +14430,7 @@
       </p:sp>
       <p:sp>
         <p:nvSpPr>
-          <p:cNvPr id="5" name="S08-card82"/>
+          <p:cNvPr id="5" name="S08-card76"/>
           <p:cNvSpPr/>
           <p:nvPr/>
         </p:nvSpPr>
@@ -14608,7 +14457,7 @@
       </p:sp>
       <p:sp>
         <p:nvSpPr>
-          <p:cNvPr id="6" name="S08-cardtext83"/>
+          <p:cNvPr id="6" name="S08-cardtext77"/>
           <p:cNvSpPr txBox="1"/>
           <p:nvPr/>
         </p:nvSpPr>
@@ -14650,7 +14499,7 @@
       </p:sp>
       <p:sp>
         <p:nvSpPr>
-          <p:cNvPr id="7" name="S08-chip84"/>
+          <p:cNvPr id="7" name="S08-chip78"/>
           <p:cNvSpPr txBox="1"/>
           <p:nvPr/>
         </p:nvSpPr>
@@ -14697,7 +14546,7 @@
       </p:sp>
       <p:sp>
         <p:nvSpPr>
-          <p:cNvPr id="8" name="S08-text85"/>
+          <p:cNvPr id="8" name="S08-text79"/>
           <p:cNvSpPr txBox="1"/>
           <p:nvPr/>
         </p:nvSpPr>
@@ -14753,7 +14602,7 @@
       </p:sp>
       <p:sp>
         <p:nvSpPr>
-          <p:cNvPr id="9" name="S08-chip86"/>
+          <p:cNvPr id="9" name="S08-chip80"/>
           <p:cNvSpPr txBox="1"/>
           <p:nvPr/>
         </p:nvSpPr>
@@ -14800,7 +14649,7 @@
       </p:sp>
       <p:sp>
         <p:nvSpPr>
-          <p:cNvPr id="10" name="S08-text87"/>
+          <p:cNvPr id="10" name="S08-text81"/>
           <p:cNvSpPr txBox="1"/>
           <p:nvPr/>
         </p:nvSpPr>
@@ -14970,7 +14819,7 @@
       </p:sp>
       <p:sp>
         <p:nvSpPr>
-          <p:cNvPr id="3" name="S09-text88"/>
+          <p:cNvPr id="3" name="S09-text82"/>
           <p:cNvSpPr txBox="1"/>
           <p:nvPr/>
         </p:nvSpPr>
@@ -15009,7 +14858,7 @@
       </p:sp>
       <p:sp>
         <p:nvSpPr>
-          <p:cNvPr id="4" name="S09-card89"/>
+          <p:cNvPr id="4" name="S09-card83"/>
           <p:cNvSpPr/>
           <p:nvPr/>
         </p:nvSpPr>
@@ -15036,7 +14885,7 @@
       </p:sp>
       <p:sp>
         <p:nvSpPr>
-          <p:cNvPr id="5" name="S09-cardtext90"/>
+          <p:cNvPr id="5" name="S09-cardtext84"/>
           <p:cNvSpPr txBox="1"/>
           <p:nvPr/>
         </p:nvSpPr>
@@ -15078,7 +14927,7 @@
       </p:sp>
       <p:graphicFrame>
         <p:nvGraphicFramePr>
-          <p:cNvPr id="10" name="S09-table91"/>
+          <p:cNvPr id="10" name="S09-table85"/>
           <p:cNvGraphicFramePr>
             <a:graphicFrameLocks noGrp="1"/>
           </p:cNvGraphicFramePr>
